--- a/doc/OpenSSL_CMP-and-generic_CMP_client_overview.pptx
+++ b/doc/OpenSSL_CMP-and-generic_CMP_client_overview.pptx
@@ -263,7 +263,7 @@
                 </a:solidFill>
                 <a:latin typeface="+mn-lt"/>
               </a:rPr>
-              <a:t>3/19/26</a:t>
+              <a:t>4/13/26</a:t>
             </a:fld>
             <a:endParaRPr lang="en-US" sz="1050">
               <a:solidFill>
@@ -526,7 +526,7 @@
             <a:fld id="{76FBC1AF-E4C9-412F-9B6D-66CD520F95DB}" type="datetimeFigureOut">
               <a:rPr lang="en-US" smtClean="0"/>
               <a:pPr/>
-              <a:t>3/19/26</a:t>
+              <a:t>4/13/26</a:t>
             </a:fld>
             <a:endParaRPr lang="en-US"/>
           </a:p>
@@ -26771,7 +26771,7 @@
                   <a:srgbClr val="FFFFFF"/>
                 </a:solidFill>
               </a:rPr>
-              <a:t> and in a nutshell</a:t>
+              <a:t> in a nutshell</a:t>
             </a:r>
           </a:p>
         </p:txBody>
@@ -28079,12 +28079,20 @@
               <a:buChar char="•"/>
             </a:pPr>
             <a:r>
-              <a:rPr lang="en-US" noProof="0" dirty="0">
+              <a:rPr lang="en-US" dirty="0">
                 <a:solidFill>
                   <a:srgbClr val="FFFFFF"/>
                 </a:solidFill>
               </a:rPr>
-              <a:t>Nearly complete C implementation of </a:t>
+              <a:t>Open-source C </a:t>
+            </a:r>
+            <a:r>
+              <a:rPr lang="en-US">
+                <a:solidFill>
+                  <a:srgbClr val="FFFFFF"/>
+                </a:solidFill>
+              </a:rPr>
+              <a:t>implementation of</a:t>
             </a:r>
             <a:br>
               <a:rPr lang="en-US" noProof="0" dirty="0">
@@ -29710,28 +29718,6 @@
 </file>
 
 <file path=customXml/item1.xml><?xml version="1.0" encoding="utf-8"?>
-<?mso-contentType ?>
-<FormTemplates xmlns="http://schemas.microsoft.com/sharepoint/v3/contenttype/forms">
-  <Display>DocumentLibraryForm</Display>
-  <Edit>DocumentLibraryForm</Edit>
-  <New>DocumentLibraryForm</New>
-</FormTemplates>
-</file>
-
-<file path=customXml/item2.xml><?xml version="1.0" encoding="utf-8"?>
-<p:properties xmlns:p="http://schemas.microsoft.com/office/2006/metadata/properties" xmlns:xsi="http://www.w3.org/2001/XMLSchema-instance" xmlns:pc="http://schemas.microsoft.com/office/infopath/2007/PartnerControls">
-  <documentManagement>
-    <_ip_UnifiedCompliancePolicyUIAction xmlns="http://schemas.microsoft.com/sharepoint/v3" xsi:nil="true"/>
-    <TaxCatchAll xmlns="56810815-8df0-4f10-8da7-34164765fbe3" xsi:nil="true"/>
-    <_ip_UnifiedCompliancePolicyProperties xmlns="http://schemas.microsoft.com/sharepoint/v3" xsi:nil="true"/>
-    <lcf76f155ced4ddcb4097134ff3c332f xmlns="a9de424c-86b2-47ed-8d4e-0a9b7010e669">
-      <Terms xmlns="http://schemas.microsoft.com/office/infopath/2007/PartnerControls"/>
-    </lcf76f155ced4ddcb4097134ff3c332f>
-  </documentManagement>
-</p:properties>
-</file>
-
-<file path=customXml/item3.xml><?xml version="1.0" encoding="utf-8"?>
 <ct:contentTypeSchema xmlns:ct="http://schemas.microsoft.com/office/2006/metadata/contentType" xmlns:ma="http://schemas.microsoft.com/office/2006/metadata/properties/metaAttributes" ct:_="" ma:_="" ma:contentTypeName="Document" ma:contentTypeID="0x01010035CD6C532085F8449DFAA9E5E2A73509" ma:contentTypeVersion="23" ma:contentTypeDescription="Create a new document." ma:contentTypeScope="" ma:versionID="af76fbf193eb45a66db61f60a7cbff52">
   <xsd:schema xmlns:xsd="http://www.w3.org/2001/XMLSchema" xmlns:xs="http://www.w3.org/2001/XMLSchema" xmlns:p="http://schemas.microsoft.com/office/2006/metadata/properties" xmlns:ns1="http://schemas.microsoft.com/sharepoint/v3" xmlns:ns2="ce079751-a51b-4a27-9376-edf93eae18d5" xmlns:ns3="a9de424c-86b2-47ed-8d4e-0a9b7010e669" xmlns:ns4="56810815-8df0-4f10-8da7-34164765fbe3" targetNamespace="http://schemas.microsoft.com/office/2006/metadata/properties" ma:root="true" ma:fieldsID="bd8cd1fc2b1a84dc4e90d6df165b6842" ns1:_="" ns2:_="" ns3:_="" ns4:_="">
     <xsd:import namespace="http://schemas.microsoft.com/sharepoint/v3"/>
@@ -30014,34 +30000,29 @@
 </ct:contentTypeSchema>
 </file>
 
-<file path=customXml/itemProps1.xml><?xml version="1.0" encoding="utf-8"?>
-<ds:datastoreItem xmlns:ds="http://schemas.openxmlformats.org/officeDocument/2006/customXml" ds:itemID="{DD2F53E9-501A-4403-AE63-66ABD38237A8}">
-  <ds:schemaRefs>
-    <ds:schemaRef ds:uri="http://schemas.microsoft.com/sharepoint/v3/contenttype/forms"/>
-  </ds:schemaRefs>
-</ds:datastoreItem>
+<file path=customXml/item2.xml><?xml version="1.0" encoding="utf-8"?>
+<?mso-contentType ?>
+<FormTemplates xmlns="http://schemas.microsoft.com/sharepoint/v3/contenttype/forms">
+  <Display>DocumentLibraryForm</Display>
+  <Edit>DocumentLibraryForm</Edit>
+  <New>DocumentLibraryForm</New>
+</FormTemplates>
 </file>
 
-<file path=customXml/itemProps2.xml><?xml version="1.0" encoding="utf-8"?>
-<ds:datastoreItem xmlns:ds="http://schemas.openxmlformats.org/officeDocument/2006/customXml" ds:itemID="{CC47DEF8-475A-49AF-9EC0-31E376036475}">
-  <ds:schemaRefs>
-    <ds:schemaRef ds:uri="http://schemas.microsoft.com/office/infopath/2007/PartnerControls"/>
-    <ds:schemaRef ds:uri="http://schemas.microsoft.com/sharepoint/v3"/>
-    <ds:schemaRef ds:uri="http://schemas.openxmlformats.org/package/2006/metadata/core-properties"/>
-    <ds:schemaRef ds:uri="http://www.w3.org/XML/1998/namespace"/>
-    <ds:schemaRef ds:uri="ce079751-a51b-4a27-9376-edf93eae18d5"/>
-    <ds:schemaRef ds:uri="http://purl.org/dc/dcmitype/"/>
-    <ds:schemaRef ds:uri="a9de424c-86b2-47ed-8d4e-0a9b7010e669"/>
-    <ds:schemaRef ds:uri="http://schemas.microsoft.com/office/2006/metadata/properties"/>
-    <ds:schemaRef ds:uri="http://schemas.microsoft.com/office/2006/documentManagement/types"/>
-    <ds:schemaRef ds:uri="56810815-8df0-4f10-8da7-34164765fbe3"/>
-    <ds:schemaRef ds:uri="http://purl.org/dc/terms/"/>
-    <ds:schemaRef ds:uri="http://purl.org/dc/elements/1.1/"/>
-  </ds:schemaRefs>
-</ds:datastoreItem>
+<file path=customXml/item3.xml><?xml version="1.0" encoding="utf-8"?>
+<p:properties xmlns:p="http://schemas.microsoft.com/office/2006/metadata/properties" xmlns:xsi="http://www.w3.org/2001/XMLSchema-instance" xmlns:pc="http://schemas.microsoft.com/office/infopath/2007/PartnerControls">
+  <documentManagement>
+    <_ip_UnifiedCompliancePolicyUIAction xmlns="http://schemas.microsoft.com/sharepoint/v3" xsi:nil="true"/>
+    <TaxCatchAll xmlns="56810815-8df0-4f10-8da7-34164765fbe3" xsi:nil="true"/>
+    <_ip_UnifiedCompliancePolicyProperties xmlns="http://schemas.microsoft.com/sharepoint/v3" xsi:nil="true"/>
+    <lcf76f155ced4ddcb4097134ff3c332f xmlns="a9de424c-86b2-47ed-8d4e-0a9b7010e669">
+      <Terms xmlns="http://schemas.microsoft.com/office/infopath/2007/PartnerControls"/>
+    </lcf76f155ced4ddcb4097134ff3c332f>
+  </documentManagement>
+</p:properties>
 </file>
 
-<file path=customXml/itemProps3.xml><?xml version="1.0" encoding="utf-8"?>
+<file path=customXml/itemProps1.xml><?xml version="1.0" encoding="utf-8"?>
 <ds:datastoreItem xmlns:ds="http://schemas.openxmlformats.org/officeDocument/2006/customXml" ds:itemID="{955A06F6-4DCF-4D9E-AEC7-8EAC18DAD573}">
   <ds:schemaRefs>
     <ds:schemaRef ds:uri="56810815-8df0-4f10-8da7-34164765fbe3"/>
@@ -30062,6 +30043,33 @@
 </ds:datastoreItem>
 </file>
 
+<file path=customXml/itemProps2.xml><?xml version="1.0" encoding="utf-8"?>
+<ds:datastoreItem xmlns:ds="http://schemas.openxmlformats.org/officeDocument/2006/customXml" ds:itemID="{DD2F53E9-501A-4403-AE63-66ABD38237A8}">
+  <ds:schemaRefs>
+    <ds:schemaRef ds:uri="http://schemas.microsoft.com/sharepoint/v3/contenttype/forms"/>
+  </ds:schemaRefs>
+</ds:datastoreItem>
+</file>
+
+<file path=customXml/itemProps3.xml><?xml version="1.0" encoding="utf-8"?>
+<ds:datastoreItem xmlns:ds="http://schemas.openxmlformats.org/officeDocument/2006/customXml" ds:itemID="{CC47DEF8-475A-49AF-9EC0-31E376036475}">
+  <ds:schemaRefs>
+    <ds:schemaRef ds:uri="http://schemas.microsoft.com/office/infopath/2007/PartnerControls"/>
+    <ds:schemaRef ds:uri="http://schemas.microsoft.com/sharepoint/v3"/>
+    <ds:schemaRef ds:uri="http://schemas.openxmlformats.org/package/2006/metadata/core-properties"/>
+    <ds:schemaRef ds:uri="http://www.w3.org/XML/1998/namespace"/>
+    <ds:schemaRef ds:uri="ce079751-a51b-4a27-9376-edf93eae18d5"/>
+    <ds:schemaRef ds:uri="http://purl.org/dc/dcmitype/"/>
+    <ds:schemaRef ds:uri="a9de424c-86b2-47ed-8d4e-0a9b7010e669"/>
+    <ds:schemaRef ds:uri="http://schemas.microsoft.com/office/2006/metadata/properties"/>
+    <ds:schemaRef ds:uri="http://schemas.microsoft.com/office/2006/documentManagement/types"/>
+    <ds:schemaRef ds:uri="56810815-8df0-4f10-8da7-34164765fbe3"/>
+    <ds:schemaRef ds:uri="http://purl.org/dc/terms/"/>
+    <ds:schemaRef ds:uri="http://purl.org/dc/elements/1.1/"/>
+  </ds:schemaRefs>
+</ds:datastoreItem>
+</file>
+
 <file path=docMetadata/LabelInfo.xml><?xml version="1.0" encoding="utf-8"?>
 <clbl:labelList xmlns:clbl="http://schemas.microsoft.com/office/2020/mipLabelMetadata">
   <clbl:label id="{9d258917-277f-42cd-a3cd-14c4e9ee58bc}" enabled="1" method="Standard" siteId="{38ae3bcd-9579-4fd4-adda-b42e1495d55a}" removed="0"/>
